--- a/template/movie_slide_template.pptx
+++ b/template/movie_slide_template.pptx
@@ -66,7 +66,7 @@
               </a:solidFill>
               <a:effectLst/>
               <a:uFillTx/>
-              <a:latin typeface="OpenDyslexic"/>
+              <a:latin typeface="Atkinson Hyperlegible Next"/>
             </a:endParaRPr>
           </a:p>
         </p:txBody>
@@ -114,7 +114,7 @@
               </a:solidFill>
               <a:effectLst/>
               <a:uFillTx/>
-              <a:latin typeface="OpenDyslexic"/>
+              <a:latin typeface="Atkinson Hyperlegible Next"/>
             </a:endParaRPr>
           </a:p>
         </p:txBody>
@@ -162,7 +162,7 @@
               </a:solidFill>
               <a:effectLst/>
               <a:uFillTx/>
-              <a:latin typeface="OpenDyslexic"/>
+              <a:latin typeface="Atkinson Hyperlegible Next"/>
             </a:endParaRPr>
           </a:p>
         </p:txBody>
@@ -225,7 +225,7 @@
                 </a:solidFill>
                 <a:effectLst/>
                 <a:uFillTx/>
-                <a:latin typeface="OpenDyslexic"/>
+                <a:latin typeface="Atkinson Hyperlegible Next"/>
               </a:defRPr>
             </a:lvl1pPr>
           </a:lstStyle>
@@ -240,7 +240,7 @@
                 </a:solidFill>
                 <a:effectLst/>
                 <a:uFillTx/>
-                <a:latin typeface="OpenDyslexic"/>
+                <a:latin typeface="Atkinson Hyperlegible Next"/>
               </a:rPr>
               <a:t>Click to edit the title text format</a:t>
             </a:r>
@@ -250,7 +250,7 @@
               </a:solidFill>
               <a:effectLst/>
               <a:uFillTx/>
-              <a:latin typeface="OpenDyslexic"/>
+              <a:latin typeface="Atkinson Hyperlegible Next"/>
             </a:endParaRPr>
           </a:p>
         </p:txBody>
@@ -302,7 +302,7 @@
                 </a:solidFill>
                 <a:effectLst/>
                 <a:uFillTx/>
-                <a:latin typeface="OpenDyslexic"/>
+                <a:latin typeface="Atkinson Hyperlegible Next"/>
               </a:defRPr>
             </a:lvl1pPr>
             <a:lvl2pPr lvl="1" algn="l">
@@ -324,7 +324,7 @@
                 </a:solidFill>
                 <a:effectLst/>
                 <a:uFillTx/>
-                <a:latin typeface="OpenDyslexic"/>
+                <a:latin typeface="Atkinson Hyperlegible Next"/>
               </a:defRPr>
             </a:lvl2pPr>
             <a:lvl3pPr lvl="2" algn="l">
@@ -346,7 +346,7 @@
                 </a:solidFill>
                 <a:effectLst/>
                 <a:uFillTx/>
-                <a:latin typeface="OpenDyslexic"/>
+                <a:latin typeface="Atkinson Hyperlegible Next"/>
               </a:defRPr>
             </a:lvl3pPr>
             <a:lvl4pPr lvl="3" algn="l">
@@ -368,7 +368,7 @@
                 </a:solidFill>
                 <a:effectLst/>
                 <a:uFillTx/>
-                <a:latin typeface="OpenDyslexic"/>
+                <a:latin typeface="Atkinson Hyperlegible Next"/>
               </a:defRPr>
             </a:lvl4pPr>
             <a:lvl5pPr lvl="4" algn="l">
@@ -390,7 +390,7 @@
                 </a:solidFill>
                 <a:effectLst/>
                 <a:uFillTx/>
-                <a:latin typeface="OpenDyslexic"/>
+                <a:latin typeface="Atkinson Hyperlegible Next"/>
               </a:defRPr>
             </a:lvl5pPr>
             <a:lvl6pPr lvl="5" algn="l">
@@ -412,7 +412,7 @@
                 </a:solidFill>
                 <a:effectLst/>
                 <a:uFillTx/>
-                <a:latin typeface="OpenDyslexic"/>
+                <a:latin typeface="Atkinson Hyperlegible Next"/>
               </a:defRPr>
             </a:lvl6pPr>
             <a:lvl7pPr lvl="6" algn="l">
@@ -434,7 +434,7 @@
                 </a:solidFill>
                 <a:effectLst/>
                 <a:uFillTx/>
-                <a:latin typeface="OpenDyslexic"/>
+                <a:latin typeface="Atkinson Hyperlegible Next"/>
               </a:defRPr>
             </a:lvl7pPr>
           </a:lstStyle>
@@ -460,7 +460,7 @@
                 </a:solidFill>
                 <a:effectLst/>
                 <a:uFillTx/>
-                <a:latin typeface="OpenDyslexic"/>
+                <a:latin typeface="Atkinson Hyperlegible Next"/>
               </a:rPr>
               <a:t>Click to edit the outline text format</a:t>
             </a:r>
@@ -470,7 +470,7 @@
               </a:solidFill>
               <a:effectLst/>
               <a:uFillTx/>
-              <a:latin typeface="OpenDyslexic"/>
+              <a:latin typeface="Atkinson Hyperlegible Next"/>
             </a:endParaRPr>
           </a:p>
           <a:p>
@@ -495,7 +495,7 @@
                 </a:solidFill>
                 <a:effectLst/>
                 <a:uFillTx/>
-                <a:latin typeface="OpenDyslexic"/>
+                <a:latin typeface="Atkinson Hyperlegible Next"/>
               </a:rPr>
               <a:t>Second Outline Level</a:t>
             </a:r>
@@ -505,7 +505,7 @@
               </a:solidFill>
               <a:effectLst/>
               <a:uFillTx/>
-              <a:latin typeface="OpenDyslexic"/>
+              <a:latin typeface="Atkinson Hyperlegible Next"/>
             </a:endParaRPr>
           </a:p>
           <a:p>
@@ -530,7 +530,7 @@
                 </a:solidFill>
                 <a:effectLst/>
                 <a:uFillTx/>
-                <a:latin typeface="OpenDyslexic"/>
+                <a:latin typeface="Atkinson Hyperlegible Next"/>
               </a:rPr>
               <a:t>Third Outline Level</a:t>
             </a:r>
@@ -540,7 +540,7 @@
               </a:solidFill>
               <a:effectLst/>
               <a:uFillTx/>
-              <a:latin typeface="OpenDyslexic"/>
+              <a:latin typeface="Atkinson Hyperlegible Next"/>
             </a:endParaRPr>
           </a:p>
           <a:p>
@@ -565,7 +565,7 @@
                 </a:solidFill>
                 <a:effectLst/>
                 <a:uFillTx/>
-                <a:latin typeface="OpenDyslexic"/>
+                <a:latin typeface="Atkinson Hyperlegible Next"/>
               </a:rPr>
               <a:t>Fourth Outline Level</a:t>
             </a:r>
@@ -575,7 +575,7 @@
               </a:solidFill>
               <a:effectLst/>
               <a:uFillTx/>
-              <a:latin typeface="OpenDyslexic"/>
+              <a:latin typeface="Atkinson Hyperlegible Next"/>
             </a:endParaRPr>
           </a:p>
           <a:p>
@@ -600,7 +600,7 @@
                 </a:solidFill>
                 <a:effectLst/>
                 <a:uFillTx/>
-                <a:latin typeface="OpenDyslexic"/>
+                <a:latin typeface="Atkinson Hyperlegible Next"/>
               </a:rPr>
               <a:t>Fifth Outline Level</a:t>
             </a:r>
@@ -610,7 +610,7 @@
               </a:solidFill>
               <a:effectLst/>
               <a:uFillTx/>
-              <a:latin typeface="OpenDyslexic"/>
+              <a:latin typeface="Atkinson Hyperlegible Next"/>
             </a:endParaRPr>
           </a:p>
           <a:p>
@@ -635,7 +635,7 @@
                 </a:solidFill>
                 <a:effectLst/>
                 <a:uFillTx/>
-                <a:latin typeface="OpenDyslexic"/>
+                <a:latin typeface="Atkinson Hyperlegible Next"/>
               </a:rPr>
               <a:t>Sixth Outline Level</a:t>
             </a:r>
@@ -645,7 +645,7 @@
               </a:solidFill>
               <a:effectLst/>
               <a:uFillTx/>
-              <a:latin typeface="OpenDyslexic"/>
+              <a:latin typeface="Atkinson Hyperlegible Next"/>
             </a:endParaRPr>
           </a:p>
           <a:p>
@@ -670,7 +670,7 @@
                 </a:solidFill>
                 <a:effectLst/>
                 <a:uFillTx/>
-                <a:latin typeface="OpenDyslexic"/>
+                <a:latin typeface="Atkinson Hyperlegible Next"/>
               </a:rPr>
               <a:t>Seventh Outline Level</a:t>
             </a:r>
@@ -680,7 +680,7 @@
               </a:solidFill>
               <a:effectLst/>
               <a:uFillTx/>
-              <a:latin typeface="OpenDyslexic"/>
+              <a:latin typeface="Atkinson Hyperlegible Next"/>
             </a:endParaRPr>
           </a:p>
         </p:txBody>
@@ -735,7 +735,7 @@
               </a:solidFill>
               <a:effectLst/>
               <a:uFillTx/>
-              <a:latin typeface="OpenDyslexic"/>
+              <a:latin typeface="Atkinson Hyperlegible Next"/>
             </a:endParaRPr>
           </a:p>
         </p:txBody>
@@ -804,7 +804,7 @@
                 </a:solidFill>
                 <a:effectLst/>
                 <a:uFillTx/>
-                <a:latin typeface="OpenDyslexic"/>
+                <a:latin typeface="Atkinson Hyperlegible Next"/>
               </a:rPr>
               <a:t>TITLE (YEAR) </a:t>
             </a:r>
@@ -814,7 +814,7 @@
               </a:solidFill>
               <a:effectLst/>
               <a:uFillTx/>
-              <a:latin typeface="OpenDyslexic"/>
+              <a:latin typeface="Atkinson Hyperlegible Next"/>
             </a:endParaRPr>
           </a:p>
         </p:txBody>
@@ -868,7 +868,7 @@
                 </a:solidFill>
                 <a:effectLst/>
                 <a:uFillTx/>
-                <a:latin typeface="OpenDyslexic"/>
+                <a:latin typeface="Atkinson Hyperlegible Next"/>
               </a:rPr>
               <a:t>Description Description Description Description Description Description</a:t>
             </a:r>
@@ -878,7 +878,7 @@
               </a:solidFill>
               <a:effectLst/>
               <a:uFillTx/>
-              <a:latin typeface="OpenDyslexic"/>
+              <a:latin typeface="Atkinson Hyperlegible Next"/>
             </a:endParaRPr>
           </a:p>
           <a:p>
@@ -906,7 +906,7 @@
                   <a:srgbClr val="FFFF00"/>
                 </a:highlight>
                 <a:uFillTx/>
-                <a:latin typeface="OpenDyslexic"/>
+                <a:latin typeface="Atkinson Hyperlegible Next"/>
               </a:rPr>
               <a:t>IMDB</a:t>
             </a:r>
@@ -917,7 +917,7 @@
                 </a:solidFill>
                 <a:effectLst/>
                 <a:uFillTx/>
-                <a:latin typeface="OpenDyslexic"/>
+                <a:latin typeface="Atkinson Hyperlegible Next"/>
               </a:rPr>
               <a:t> rating ##, ##k votes </a:t>
             </a:r>
@@ -927,7 +927,7 @@
               </a:solidFill>
               <a:effectLst/>
               <a:uFillTx/>
-              <a:latin typeface="OpenDyslexic"/>
+              <a:latin typeface="Atkinson Hyperlegible Next"/>
             </a:endParaRPr>
           </a:p>
           <a:p>
@@ -952,7 +952,7 @@
                 </a:solidFill>
                 <a:effectLst/>
                 <a:uFillTx/>
-                <a:latin typeface="OpenDyslexic"/>
+                <a:latin typeface="Atkinson Hyperlegible Next"/>
                 <a:ea typeface="Arial Unicode MS"/>
               </a:rPr>
               <a:t>Critics: RT</a:t>
@@ -964,7 +964,7 @@
                 </a:solidFill>
                 <a:effectLst/>
                 <a:uFillTx/>
-                <a:latin typeface="OpenDyslexic"/>
+                <a:latin typeface="Atkinson Hyperlegible Next"/>
               </a:rPr>
               <a:t>🍅🤢 ##% / MS </a:t>
             </a:r>
@@ -978,7 +978,7 @@
                   <a:srgbClr val="AFD095"/>
                 </a:highlight>
                 <a:uFillTx/>
-                <a:latin typeface="OpenDyslexic"/>
+                <a:latin typeface="Atkinson Hyperlegible Next"/>
               </a:rPr>
               <a:t>##</a:t>
             </a:r>
@@ -988,7 +988,7 @@
               </a:solidFill>
               <a:effectLst/>
               <a:uFillTx/>
-              <a:latin typeface="OpenDyslexic"/>
+              <a:latin typeface="Atkinson Hyperlegible Next"/>
             </a:endParaRPr>
           </a:p>
           <a:p>
@@ -1013,7 +1013,7 @@
                 </a:solidFill>
                 <a:effectLst/>
                 <a:uFillTx/>
-                <a:latin typeface="OpenDyslexic"/>
+                <a:latin typeface="Atkinson Hyperlegible Next"/>
               </a:rPr>
               <a:t>Genre: x</a:t>
             </a:r>
@@ -1023,7 +1023,7 @@
               </a:solidFill>
               <a:effectLst/>
               <a:uFillTx/>
-              <a:latin typeface="OpenDyslexic"/>
+              <a:latin typeface="Atkinson Hyperlegible Next"/>
             </a:endParaRPr>
           </a:p>
           <a:p>
@@ -1048,7 +1048,7 @@
                 </a:solidFill>
                 <a:effectLst/>
                 <a:uFillTx/>
-                <a:latin typeface="OpenDyslexic"/>
+                <a:latin typeface="Atkinson Hyperlegible Next"/>
               </a:rPr>
               <a:t>Director: x</a:t>
             </a:r>
@@ -1058,7 +1058,7 @@
               </a:solidFill>
               <a:effectLst/>
               <a:uFillTx/>
-              <a:latin typeface="OpenDyslexic"/>
+              <a:latin typeface="Atkinson Hyperlegible Next"/>
             </a:endParaRPr>
           </a:p>
           <a:p>
@@ -1083,7 +1083,7 @@
                 </a:solidFill>
                 <a:effectLst/>
                 <a:uFillTx/>
-                <a:latin typeface="OpenDyslexic"/>
+                <a:latin typeface="Atkinson Hyperlegible Next"/>
               </a:rPr>
               <a:t>Language: x</a:t>
             </a:r>
@@ -1093,7 +1093,7 @@
               </a:solidFill>
               <a:effectLst/>
               <a:uFillTx/>
-              <a:latin typeface="OpenDyslexic"/>
+              <a:latin typeface="Atkinson Hyperlegible Next"/>
             </a:endParaRPr>
           </a:p>
           <a:p>
@@ -1118,7 +1118,7 @@
                 </a:solidFill>
                 <a:effectLst/>
                 <a:uFillTx/>
-                <a:latin typeface="OpenDyslexic"/>
+                <a:latin typeface="Atkinson Hyperlegible Next"/>
               </a:rPr>
               <a:t>Run time: x min</a:t>
             </a:r>
@@ -1128,7 +1128,7 @@
               </a:solidFill>
               <a:effectLst/>
               <a:uFillTx/>
-              <a:latin typeface="OpenDyslexic"/>
+              <a:latin typeface="Atkinson Hyperlegible Next"/>
             </a:endParaRPr>
           </a:p>
           <a:p>
@@ -1153,7 +1153,7 @@
                 </a:solidFill>
                 <a:effectLst/>
                 <a:uFillTx/>
-                <a:latin typeface="OpenDyslexic"/>
+                <a:latin typeface="Atkinson Hyperlegible Next"/>
               </a:rPr>
               <a:t>Review Summary: </a:t>
             </a:r>
@@ -1163,7 +1163,7 @@
               </a:solidFill>
               <a:effectLst/>
               <a:uFillTx/>
-              <a:latin typeface="OpenDyslexic"/>
+              <a:latin typeface="Atkinson Hyperlegible Next"/>
             </a:endParaRPr>
           </a:p>
           <a:p>
@@ -1188,7 +1188,7 @@
                 </a:solidFill>
                 <a:effectLst/>
                 <a:uFillTx/>
-                <a:latin typeface="OpenDyslexic"/>
+                <a:latin typeface="Atkinson Hyperlegible Next"/>
               </a:rPr>
               <a:t>Notes: </a:t>
             </a:r>
@@ -1198,7 +1198,7 @@
               </a:solidFill>
               <a:effectLst/>
               <a:uFillTx/>
-              <a:latin typeface="OpenDyslexic"/>
+              <a:latin typeface="Atkinson Hyperlegible Next"/>
             </a:endParaRPr>
           </a:p>
         </p:txBody>
@@ -1250,7 +1250,7 @@
                 </a:solidFill>
                 <a:effectLst/>
                 <a:uFillTx/>
-                <a:latin typeface="OpenDyslexic"/>
+                <a:latin typeface="Atkinson Hyperlegible Next"/>
               </a:rPr>
               <a:t>POSTER</a:t>
             </a:r>
@@ -1260,7 +1260,7 @@
               </a:solidFill>
               <a:effectLst/>
               <a:uFillTx/>
-              <a:latin typeface="OpenDyslexic"/>
+              <a:latin typeface="Atkinson Hyperlegible Next"/>
             </a:endParaRPr>
           </a:p>
         </p:txBody>
